--- a/results/251202_Project_Update.pptx
+++ b/results/251202_Project_Update.pptx
@@ -225,7 +225,7 @@
           <a:p>
             <a:fld id="{412A36AD-C140-47B5-A0AA-2808AF1C1C9D}" type="datetimeFigureOut">
               <a:rPr lang="en-AU" smtClean="0"/>
-              <a:t>2/12/2025</a:t>
+              <a:t>3/12/2025</a:t>
             </a:fld>
             <a:endParaRPr lang="en-AU"/>
           </a:p>
@@ -390,7 +390,7 @@
           <a:p>
             <a:fld id="{2763829E-EB69-4A98-9D54-8D6822520B27}" type="datetimeFigureOut">
               <a:rPr lang="en-AU" smtClean="0"/>
-              <a:t>2/12/2025</a:t>
+              <a:t>3/12/2025</a:t>
             </a:fld>
             <a:endParaRPr lang="en-AU"/>
           </a:p>
@@ -36057,7 +36057,65 @@
                   <a:schemeClr val="accent1"/>
                 </a:solidFill>
               </a:rPr>
-              <a:t>But, instead of intrinsic resistance data, I think we need to collect a missense mutations associated with rifampicin adaptation from the literature.</a:t>
+              <a:t>A model the number of times each adaptive events occurs using codon frequency and mutation rate. </a:t>
+            </a:r>
+          </a:p>
+          <a:p>
+            <a:pPr marL="0" lvl="2" indent="0">
+              <a:buNone/>
+            </a:pPr>
+            <a:r>
+              <a:rPr lang="en-US" sz="1200" dirty="0">
+                <a:solidFill>
+                  <a:schemeClr val="accent1"/>
+                </a:solidFill>
+              </a:rPr>
+              <a:t>Many previous studies are restricted to </a:t>
+            </a:r>
+            <a:r>
+              <a:rPr lang="en-US" sz="1200" i="1" dirty="0">
+                <a:solidFill>
+                  <a:schemeClr val="accent1"/>
+                </a:solidFill>
+              </a:rPr>
+              <a:t>M. tuberculosis</a:t>
+            </a:r>
+            <a:r>
+              <a:rPr lang="en-US" sz="1200" dirty="0">
+                <a:solidFill>
+                  <a:schemeClr val="accent1"/>
+                </a:solidFill>
+              </a:rPr>
+              <a:t> or survey resistance across broad antibiotic classes, resulting in relatively few mutations associated with any one antibiotic.</a:t>
+            </a:r>
+          </a:p>
+          <a:p>
+            <a:pPr marL="0" lvl="2" indent="0">
+              <a:buNone/>
+            </a:pPr>
+            <a:r>
+              <a:rPr lang="en-US" sz="1200" dirty="0">
+                <a:solidFill>
+                  <a:schemeClr val="accent1"/>
+                </a:solidFill>
+              </a:rPr>
+              <a:t>All previous </a:t>
+            </a:r>
+            <a:r>
+              <a:rPr lang="en-US" sz="1200">
+                <a:solidFill>
+                  <a:schemeClr val="accent1"/>
+                </a:solidFill>
+              </a:rPr>
+              <a:t>studies collected mutations </a:t>
+            </a:r>
+            <a:r>
+              <a:rPr lang="en-US" sz="1200" dirty="0">
+                <a:solidFill>
+                  <a:schemeClr val="accent1"/>
+                </a:solidFill>
+              </a:rPr>
+              <a:t>associated with adaptation from the literature.</a:t>
             </a:r>
           </a:p>
           <a:p>
@@ -37578,12 +37636,9 @@
 </file>
 
 <file path=customXml/item1.xml><?xml version="1.0" encoding="utf-8"?>
-<?mso-contentType ?>
-<FormTemplates xmlns="http://schemas.microsoft.com/sharepoint/v3/contenttype/forms">
-  <Display>DocumentLibraryForm</Display>
-  <Edit>DocumentLibraryForm</Edit>
-  <New>DocumentLibraryForm</New>
-</FormTemplates>
+<p:properties xmlns:p="http://schemas.microsoft.com/office/2006/metadata/properties" xmlns:xsi="http://www.w3.org/2001/XMLSchema-instance" xmlns:pc="http://schemas.microsoft.com/office/infopath/2007/PartnerControls">
+  <documentManagement/>
+</p:properties>
 </file>
 
 <file path=customXml/item2.xml><?xml version="1.0" encoding="utf-8"?>
@@ -37725,15 +37780,19 @@
 </file>
 
 <file path=customXml/item3.xml><?xml version="1.0" encoding="utf-8"?>
-<p:properties xmlns:p="http://schemas.microsoft.com/office/2006/metadata/properties" xmlns:xsi="http://www.w3.org/2001/XMLSchema-instance" xmlns:pc="http://schemas.microsoft.com/office/infopath/2007/PartnerControls">
-  <documentManagement/>
-</p:properties>
+<?mso-contentType ?>
+<FormTemplates xmlns="http://schemas.microsoft.com/sharepoint/v3/contenttype/forms">
+  <Display>DocumentLibraryForm</Display>
+  <Edit>DocumentLibraryForm</Edit>
+  <New>DocumentLibraryForm</New>
+</FormTemplates>
 </file>
 
 <file path=customXml/itemProps1.xml><?xml version="1.0" encoding="utf-8"?>
-<ds:datastoreItem xmlns:ds="http://schemas.openxmlformats.org/officeDocument/2006/customXml" ds:itemID="{732F4D4E-5CC3-44EF-852B-455B45EFC022}">
+<ds:datastoreItem xmlns:ds="http://schemas.openxmlformats.org/officeDocument/2006/customXml" ds:itemID="{0BA6ACFB-BBAF-41D0-B45A-5E57454824E9}">
   <ds:schemaRefs>
-    <ds:schemaRef ds:uri="http://schemas.microsoft.com/sharepoint/v3/contenttype/forms"/>
+    <ds:schemaRef ds:uri="http://schemas.microsoft.com/office/2006/metadata/properties"/>
+    <ds:schemaRef ds:uri="http://schemas.microsoft.com/office/infopath/2007/PartnerControls"/>
   </ds:schemaRefs>
 </ds:datastoreItem>
 </file>
@@ -37757,10 +37816,9 @@
 </file>
 
 <file path=customXml/itemProps3.xml><?xml version="1.0" encoding="utf-8"?>
-<ds:datastoreItem xmlns:ds="http://schemas.openxmlformats.org/officeDocument/2006/customXml" ds:itemID="{0BA6ACFB-BBAF-41D0-B45A-5E57454824E9}">
+<ds:datastoreItem xmlns:ds="http://schemas.openxmlformats.org/officeDocument/2006/customXml" ds:itemID="{732F4D4E-5CC3-44EF-852B-455B45EFC022}">
   <ds:schemaRefs>
-    <ds:schemaRef ds:uri="http://schemas.microsoft.com/office/2006/metadata/properties"/>
-    <ds:schemaRef ds:uri="http://schemas.microsoft.com/office/infopath/2007/PartnerControls"/>
+    <ds:schemaRef ds:uri="http://schemas.microsoft.com/sharepoint/v3/contenttype/forms"/>
   </ds:schemaRefs>
 </ds:datastoreItem>
 </file>